--- a/Curriculo/Fase3_Basico2/decks/Basico2_S07_Jay.pptx
+++ b/Curriculo/Fase3_Basico2/decks/Basico2_S07_Jay.pptx
@@ -143,7 +143,7 @@
   <p:extLst>
     <p:ext uri="{521415D9-36F7-43E2-AB2F-B90AF26B5E84}">
       <p14:sectionLst xmlns:p14="http://schemas.microsoft.com/office/powerpoint/2010/main">
-        <p14:section name="Semana 7" id="{CA1EC7BF-2BE9-D256-5AD7-2B79616321D2}">
+        <p14:section name="Semana 7" id="{B5009A4D-A84E-FD2A-F673-AF8AD2AA587F}">
           <p14:sldIdLst>
             <p14:sldId id="256"/>
             <p14:sldId id="257"/>
@@ -218,7 +218,7 @@
     </p:spTree>
     <p:extLst>
       <p:ext uri="{BB962C8B-B14F-4D97-AF65-F5344CB8AC3E}">
-        <p14:creationId xmlns:p14="http://schemas.microsoft.com/office/powerpoint/2010/main" val="1468570011"/>
+        <p14:creationId xmlns:p14="http://schemas.microsoft.com/office/powerpoint/2010/main" val="929113359"/>
       </p:ext>
     </p:extLst>
   </p:cSld>
@@ -364,7 +364,7 @@
           <a:p>
             <a:r>
               <a:rPr lang="en-US" dirty="0"/>
-              <a:t>21:00. Inicia la grabación en la nube desde el minuto 0 (Basico2_S07_2026-11-25) y saluda: 안녕하세요, 여러분! Pon el chat en «Solo anfitriones y coanfitriones» antes de pegar el quiz. Ten sobre la mesa una taza de café, una de té y la billetera con el billete de 천 원.
+              <a:t>21:00. Inicia la grabación en la nube desde el minuto 0 (Basico2_S07_2026-12-02) y saluda: 안녕하세요, 여러분! Pon el chat en «Solo anfitriones y coanfitriones» antes de pegar el quiz. Ten sobre la mesa una taza de café, una de té y la billetera con el billete de 천 원.
 Fuente: Nueva
 Lámina 1</a:t>
             </a:r>
@@ -632,7 +632,7 @@
           <a:p>
             <a:r>
               <a:rPr lang="en-US" dirty="0"/>
-              <a:t>21:12–21:13 (1 min, en coreano, con las dos fotos): 제 고향은 서울이에요. 지금은 산티아고에 살아요. 서울이 산티아고보다 더 커요. 맞아요? Espera el 맞아요 y sigue: 그리고 오늘은… 산티아고가 서울보다 더 더워요! 서울은 지금 추워요. [validar] Mira el clima el martes 24 (D-S7-5).
+              <a:t>21:12–21:13 (1 min, en coreano, con las dos fotos): 제 고향은 서울이에요. 지금은 산티아고에 살아요. 서울이 산티아고보다 더 커요. 맞아요? Espera el 맞아요 y sigue: 그리고 오늘은… 산티아고가 서울보다 더 더워요! 서울은 지금 추워요. [validar] Mira el clima el martes 1 (D-S7-5).
 Imagen: incluida (dibujo de la casa).
 Fuente: Fotos libres
 Lámina 12</a:t>
@@ -2685,7 +2685,7 @@
           <a:p>
             <a:r>
               <a:rPr lang="en-US" dirty="0"/>
-              <a:t>Dentro de los 2 min de tarea. «El lunes 30 llega el simulacro corto, 10 preguntas. Y el miércoles: 21:00 calentamiento, 21:10 examen escrito tipeado en 한글 (prueben el teclado), 21:40 la conversación. Si saben que no pueden venir el 2, avísenme esta semana.» No anuncies ninguna regla del certificado: está pendiente de decisión.
+              <a:t>Dentro de los 2 min de tarea. «El lunes 7 llega el simulacro corto, 10 preguntas. Y el miércoles: 21:00 calentamiento, 21:10 examen escrito tipeado en 한글 (prueben el teclado), 21:40 la conversación. Si saben que no pueden venir el 9, avísenme esta semana.» No anuncies ninguna regla del certificado: está pendiente de decisión.
 Fuente: E.5, F.5
 Lámina 33</a:t>
             </a:r>
@@ -4660,7 +4660,7 @@
                   <a:srgbClr val="4236F6"/>
                 </a:solidFill>
               </a:rPr>
-              <a:t>Básico 2 · Semana 7 · miércoles 25 de noviembre · 21:00</a:t>
+              <a:t>Básico 2 · Semana 7 · miércoles 2 de diciembre · 21:00</a:t>
             </a:r>
             <a:endParaRPr lang="en-US" sz="1800" dirty="0"/>
           </a:p>
@@ -8247,7 +8247,7 @@
           <p:nvPr>
             <p:extLst>
               <p:ext uri="{D42A27DB-BD31-4B8C-83A1-F6EECF244321}">
-                <p14:modId xmlns:p14="http://schemas.microsoft.com/office/powerpoint/2010/main" val="4282630952"/>
+                <p14:modId xmlns:p14="http://schemas.microsoft.com/office/powerpoint/2010/main" val="2532132470"/>
               </p:ext>
             </p:extLst>
           </p:nvPr>
@@ -14871,7 +14871,7 @@
           <p:nvPr>
             <p:extLst>
               <p:ext uri="{D42A27DB-BD31-4B8C-83A1-F6EECF244321}">
-                <p14:modId xmlns:p14="http://schemas.microsoft.com/office/powerpoint/2010/main" val="455976143"/>
+                <p14:modId xmlns:p14="http://schemas.microsoft.com/office/powerpoint/2010/main" val="4022871546"/>
               </p:ext>
             </p:extLst>
           </p:nvPr>
@@ -16473,7 +16473,7 @@
           <p:nvPr>
             <p:extLst>
               <p:ext uri="{D42A27DB-BD31-4B8C-83A1-F6EECF244321}">
-                <p14:modId xmlns:p14="http://schemas.microsoft.com/office/powerpoint/2010/main" val="2023582816"/>
+                <p14:modId xmlns:p14="http://schemas.microsoft.com/office/powerpoint/2010/main" val="4136287275"/>
               </p:ext>
             </p:extLst>
           </p:nvPr>
@@ -18530,7 +18530,7 @@
           <p:nvPr>
             <p:extLst>
               <p:ext uri="{D42A27DB-BD31-4B8C-83A1-F6EECF244321}">
-                <p14:modId xmlns:p14="http://schemas.microsoft.com/office/powerpoint/2010/main" val="997210716"/>
+                <p14:modId xmlns:p14="http://schemas.microsoft.com/office/powerpoint/2010/main" val="3428751269"/>
               </p:ext>
             </p:extLst>
           </p:nvPr>
@@ -20448,7 +20448,7 @@
           <p:nvPr>
             <p:extLst>
               <p:ext uri="{D42A27DB-BD31-4B8C-83A1-F6EECF244321}">
-                <p14:modId xmlns:p14="http://schemas.microsoft.com/office/powerpoint/2010/main" val="3355373271"/>
+                <p14:modId xmlns:p14="http://schemas.microsoft.com/office/powerpoint/2010/main" val="211053745"/>
               </p:ext>
             </p:extLst>
           </p:nvPr>
@@ -21999,7 +21999,7 @@
                   <a:srgbClr val="4236F6"/>
                 </a:solidFill>
               </a:rPr>
-              <a:t>Antes del miércoles 2 de diciembre, 21:00</a:t>
+              <a:t>Antes del miércoles 9 de diciembre, 21:00</a:t>
             </a:r>
             <a:endParaRPr lang="en-US" sz="1800" dirty="0"/>
           </a:p>
@@ -22059,7 +22059,7 @@
                   <a:srgbClr val="14142B"/>
                 </a:solidFill>
               </a:rPr>
-              <a:t>Si la mandas hasta el dom 29, vuelve corregida el mar 1</a:t>
+              <a:t>Si la mandas hasta el dom 6, vuelve corregida el mar 8</a:t>
             </a:r>
             <a:endParaRPr lang="en-US" sz="1800" dirty="0"/>
           </a:p>
@@ -22511,7 +22511,7 @@
                   <a:srgbClr val="14142B"/>
                 </a:solidFill>
               </a:rPr>
-              <a:t>Lun 30 nov: simulacro corto del examen (10 preguntas)</a:t>
+              <a:t>Lun 7 dic: simulacro corto del examen (10 preguntas)</a:t>
             </a:r>
             <a:endParaRPr lang="en-US" sz="2200" dirty="0"/>
           </a:p>
@@ -22529,7 +22529,7 @@
                   <a:srgbClr val="14142B"/>
                 </a:solidFill>
               </a:rPr>
-              <a:t>Mié 2 dic, 21:00: calentamiento</a:t>
+              <a:t>Mié 9 dic, 21:00: calentamiento</a:t>
             </a:r>
             <a:endParaRPr lang="en-US" sz="2200" dirty="0"/>
           </a:p>
@@ -22990,7 +22990,7 @@
           <p:nvPr>
             <p:extLst>
               <p:ext uri="{D42A27DB-BD31-4B8C-83A1-F6EECF244321}">
-                <p14:modId xmlns:p14="http://schemas.microsoft.com/office/powerpoint/2010/main" val="3356489117"/>
+                <p14:modId xmlns:p14="http://schemas.microsoft.com/office/powerpoint/2010/main" val="1704375519"/>
               </p:ext>
             </p:extLst>
           </p:nvPr>
@@ -25488,7 +25488,7 @@
           <p:nvPr>
             <p:extLst>
               <p:ext uri="{D42A27DB-BD31-4B8C-83A1-F6EECF244321}">
-                <p14:modId xmlns:p14="http://schemas.microsoft.com/office/powerpoint/2010/main" val="584503016"/>
+                <p14:modId xmlns:p14="http://schemas.microsoft.com/office/powerpoint/2010/main" val="4292122036"/>
               </p:ext>
             </p:extLst>
           </p:nvPr>
@@ -27835,7 +27835,7 @@
           <p:nvPr>
             <p:extLst>
               <p:ext uri="{D42A27DB-BD31-4B8C-83A1-F6EECF244321}">
-                <p14:modId xmlns:p14="http://schemas.microsoft.com/office/powerpoint/2010/main" val="17070539"/>
+                <p14:modId xmlns:p14="http://schemas.microsoft.com/office/powerpoint/2010/main" val="2619281295"/>
               </p:ext>
             </p:extLst>
           </p:nvPr>
@@ -29922,7 +29922,7 @@
           <p:nvPr>
             <p:extLst>
               <p:ext uri="{D42A27DB-BD31-4B8C-83A1-F6EECF244321}">
-                <p14:modId xmlns:p14="http://schemas.microsoft.com/office/powerpoint/2010/main" val="3991146356"/>
+                <p14:modId xmlns:p14="http://schemas.microsoft.com/office/powerpoint/2010/main" val="368257293"/>
               </p:ext>
             </p:extLst>
           </p:nvPr>
@@ -31577,7 +31577,7 @@
           <p:nvPr>
             <p:extLst>
               <p:ext uri="{D42A27DB-BD31-4B8C-83A1-F6EECF244321}">
-                <p14:modId xmlns:p14="http://schemas.microsoft.com/office/powerpoint/2010/main" val="334692154"/>
+                <p14:modId xmlns:p14="http://schemas.microsoft.com/office/powerpoint/2010/main" val="2490017462"/>
               </p:ext>
             </p:extLst>
           </p:nvPr>
